--- a/assets/pptx/catalog-136.pptx
+++ b/assets/pptx/catalog-136.pptx
@@ -3368,7 +3368,7 @@
                 <a:ea typeface="Ebrima"/>
                 <a:cs typeface="Ebrima"/>
               </a:rPr>
-              <a:t>ይግባኝ(6)</a:t>
+              <a:t>ይግባኝ6</a:t>
             </a:r>
           </a:p>
           <a:p>
@@ -3561,7 +3561,7 @@
                 <a:ea typeface="Ebrima"/>
                 <a:cs typeface="Ebrima"/>
               </a:rPr>
-              <a:t>የመስቀሉ ታሪክ/ፍቅር ይግባኝ(3)</a:t>
+              <a:t>የመስቀሉ ታሪክ/ፍቅር ይግባኝ3</a:t>
             </a:r>
           </a:p>
         </p:txBody>
@@ -3646,7 +3646,7 @@
                 <a:ea typeface="Ebrima"/>
                 <a:cs typeface="Ebrima"/>
               </a:rPr>
-              <a:t>በዘመኔ ስኖር ኣንተን ማስደሰት (2)</a:t>
+              <a:t>በዘመኔ ስኖር ኣንተን ማስደሰት 2</a:t>
             </a:r>
           </a:p>
           <a:p>
@@ -3870,7 +3870,7 @@
                 <a:ea typeface="Ebrima"/>
                 <a:cs typeface="Ebrima"/>
               </a:rPr>
-              <a:t>ይግባኝ(6)</a:t>
+              <a:t>ይግባኝ6</a:t>
             </a:r>
           </a:p>
           <a:p>
@@ -4063,7 +4063,7 @@
                 <a:ea typeface="Ebrima"/>
                 <a:cs typeface="Ebrima"/>
               </a:rPr>
-              <a:t>የመስቀሉ ታሪክ/ፍቅር ይግባኝ(3)</a:t>
+              <a:t>የመስቀሉ ታሪክ/ፍቅር ይግባኝ3</a:t>
             </a:r>
           </a:p>
         </p:txBody>
